--- a/documentation/prez/presentation_suivi_2.pptx
+++ b/documentation/prez/presentation_suivi_2.pptx
@@ -1161,7 +1161,7 @@
           <a:p>
             <a:pPr/>
             <a:r>
-              <a:t>L'inventaire est complet depuis le 29 septembre : 96 292 enregistrements de 2 min, 3 204 h, 2,2 To, sur quatre sites. Deux campagnes. La phénologie 2023-2024 : Kaw, Molokoï et Trésor, deux enregistreurs par site, un an de décembre 2023 à novembre 2024, 2 225 h. La campagne 2026 : une semaine par relevé, à Mataroni, à Kaw (relevés CDR, Patawa Est et Patawa Ouest) et à Trésor (relevé RNRT, la réserve naturelle régionale Trésor), 979 h. Tous les enregistrements font 2 min, toutes les 30 min de 5 h à 20 h, en 48 kHz stéréo. Après les drapeaux, 94 588 enregistrements restent encodables, soit 4,5 millions de fenêtres de 5 s au pas de 2,5 s. Deux conséquences : Mataroni n'a qu'une semaine de 2026, et seul le jeu 2023 couvre toutes les saisons ; les 345 positifs et 150 négatifs de Blancinet sortent de l'entraînement et de l'évaluation.</a:t>
+              <a:t>L'inventaire est complet depuis le 29 septembre : 96 292 enregistrements de 2 min, 3 204 h, 2,2 To, sur quatre sites. Deux campagnes. La phénologie 2023-2024 : Kaw, Molokoï et Trésor, deux enregistreurs par site, un an de décembre 2023 à novembre 2024, 2 225 h. La campagne 2026 : une semaine par relevé, à Mataroni, à Kaw (relevés CDR, Patawa Est et Patawa Ouest) et à Trésor (relevé RNRT, la réserve naturelle régionale Trésor), 979 h. Tous les enregistrements font 2 min, toutes les 30 min de 5 h à 20 h, en 48 kHz stéréo. Après les drapeaux, 94 588 enregistrements restent encodables, soit 4,5 millions de fenêtres de 5 s au pas de 2,5 s. Deux conséquences : Mataroni n'a qu'une semaine de 2026, et seul le jeu 2023 couvre toutes les saisons.</a:t>
             </a:r>
           </a:p>
         </p:txBody>
@@ -14869,7 +14869,7 @@
               </a:defRPr>
             </a:pPr>
             <a:r>
-              <a:t>Labels Blancinet (345 + 150) : sortis</a:t>
+              <a:t>Annotations reprises de zéro</a:t>
             </a:r>
           </a:p>
         </p:txBody>
